--- a/OLAP_Cube.pptx
+++ b/OLAP_Cube.pptx
@@ -5,11 +5,13 @@
     <p:sldMasterId id="2147483648" r:id="rId1"/>
   </p:sldMasterIdLst>
   <p:notesMasterIdLst>
-    <p:notesMasterId r:id="rId4"/>
+    <p:notesMasterId r:id="rId6"/>
   </p:notesMasterIdLst>
   <p:sldIdLst>
     <p:sldId id="334" r:id="rId2"/>
     <p:sldId id="333" r:id="rId3"/>
+    <p:sldId id="335" r:id="rId4"/>
+    <p:sldId id="337" r:id="rId5"/>
   </p:sldIdLst>
   <p:sldSz cx="12192000" cy="6858000"/>
   <p:notesSz cx="6858000" cy="9144000"/>
@@ -198,7 +200,7 @@
           <a:p>
             <a:fld id="{C2E15B94-D9E4-E149-8081-23A720D1EE5F}" type="datetimeFigureOut">
               <a:rPr lang="en-US" smtClean="0"/>
-              <a:t>3/23/21</a:t>
+              <a:t>3/24/21</a:t>
             </a:fld>
             <a:endParaRPr lang="en-US"/>
           </a:p>
@@ -612,7 +614,7 @@
           <a:p>
             <a:fld id="{FBD852D7-E694-214E-8A12-510E0A0329D2}" type="datetimeFigureOut">
               <a:rPr lang="en-US" smtClean="0"/>
-              <a:t>3/23/21</a:t>
+              <a:t>3/24/21</a:t>
             </a:fld>
             <a:endParaRPr lang="en-US"/>
           </a:p>
@@ -810,7 +812,7 @@
           <a:p>
             <a:fld id="{FBD852D7-E694-214E-8A12-510E0A0329D2}" type="datetimeFigureOut">
               <a:rPr lang="en-US" smtClean="0"/>
-              <a:t>3/23/21</a:t>
+              <a:t>3/24/21</a:t>
             </a:fld>
             <a:endParaRPr lang="en-US"/>
           </a:p>
@@ -1018,7 +1020,7 @@
           <a:p>
             <a:fld id="{FBD852D7-E694-214E-8A12-510E0A0329D2}" type="datetimeFigureOut">
               <a:rPr lang="en-US" smtClean="0"/>
-              <a:t>3/23/21</a:t>
+              <a:t>3/24/21</a:t>
             </a:fld>
             <a:endParaRPr lang="en-US"/>
           </a:p>
@@ -1216,7 +1218,7 @@
           <a:p>
             <a:fld id="{FBD852D7-E694-214E-8A12-510E0A0329D2}" type="datetimeFigureOut">
               <a:rPr lang="en-US" smtClean="0"/>
-              <a:t>3/23/21</a:t>
+              <a:t>3/24/21</a:t>
             </a:fld>
             <a:endParaRPr lang="en-US"/>
           </a:p>
@@ -1491,7 +1493,7 @@
           <a:p>
             <a:fld id="{FBD852D7-E694-214E-8A12-510E0A0329D2}" type="datetimeFigureOut">
               <a:rPr lang="en-US" smtClean="0"/>
-              <a:t>3/23/21</a:t>
+              <a:t>3/24/21</a:t>
             </a:fld>
             <a:endParaRPr lang="en-US"/>
           </a:p>
@@ -1756,7 +1758,7 @@
           <a:p>
             <a:fld id="{FBD852D7-E694-214E-8A12-510E0A0329D2}" type="datetimeFigureOut">
               <a:rPr lang="en-US" smtClean="0"/>
-              <a:t>3/23/21</a:t>
+              <a:t>3/24/21</a:t>
             </a:fld>
             <a:endParaRPr lang="en-US"/>
           </a:p>
@@ -2168,7 +2170,7 @@
           <a:p>
             <a:fld id="{FBD852D7-E694-214E-8A12-510E0A0329D2}" type="datetimeFigureOut">
               <a:rPr lang="en-US" smtClean="0"/>
-              <a:t>3/23/21</a:t>
+              <a:t>3/24/21</a:t>
             </a:fld>
             <a:endParaRPr lang="en-US"/>
           </a:p>
@@ -2309,7 +2311,7 @@
           <a:p>
             <a:fld id="{FBD852D7-E694-214E-8A12-510E0A0329D2}" type="datetimeFigureOut">
               <a:rPr lang="en-US" smtClean="0"/>
-              <a:t>3/23/21</a:t>
+              <a:t>3/24/21</a:t>
             </a:fld>
             <a:endParaRPr lang="en-US"/>
           </a:p>
@@ -2422,7 +2424,7 @@
           <a:p>
             <a:fld id="{FBD852D7-E694-214E-8A12-510E0A0329D2}" type="datetimeFigureOut">
               <a:rPr lang="en-US" smtClean="0"/>
-              <a:t>3/23/21</a:t>
+              <a:t>3/24/21</a:t>
             </a:fld>
             <a:endParaRPr lang="en-US"/>
           </a:p>
@@ -2733,7 +2735,7 @@
           <a:p>
             <a:fld id="{FBD852D7-E694-214E-8A12-510E0A0329D2}" type="datetimeFigureOut">
               <a:rPr lang="en-US" smtClean="0"/>
-              <a:t>3/23/21</a:t>
+              <a:t>3/24/21</a:t>
             </a:fld>
             <a:endParaRPr lang="en-US"/>
           </a:p>
@@ -3021,7 +3023,7 @@
           <a:p>
             <a:fld id="{FBD852D7-E694-214E-8A12-510E0A0329D2}" type="datetimeFigureOut">
               <a:rPr lang="en-US" smtClean="0"/>
-              <a:t>3/23/21</a:t>
+              <a:t>3/24/21</a:t>
             </a:fld>
             <a:endParaRPr lang="en-US"/>
           </a:p>
@@ -3262,7 +3264,7 @@
           <a:p>
             <a:fld id="{FBD852D7-E694-214E-8A12-510E0A0329D2}" type="datetimeFigureOut">
               <a:rPr lang="en-US" smtClean="0"/>
-              <a:t>3/23/21</a:t>
+              <a:t>3/24/21</a:t>
             </a:fld>
             <a:endParaRPr lang="en-US"/>
           </a:p>
@@ -5130,6 +5132,761 @@
 </p:sld>
 </file>
 
+<file path=ppt/slides/slide3.xml><?xml version="1.0" encoding="utf-8"?>
+<p:sld xmlns:a="http://schemas.openxmlformats.org/drawingml/2006/main" xmlns:r="http://schemas.openxmlformats.org/officeDocument/2006/relationships" xmlns:p="http://schemas.openxmlformats.org/presentationml/2006/main">
+  <p:cSld>
+    <p:spTree>
+      <p:nvGrpSpPr>
+        <p:cNvPr id="1" name=""/>
+        <p:cNvGrpSpPr/>
+        <p:nvPr/>
+      </p:nvGrpSpPr>
+      <p:grpSpPr>
+        <a:xfrm>
+          <a:off x="0" y="0"/>
+          <a:ext cx="0" cy="0"/>
+          <a:chOff x="0" y="0"/>
+          <a:chExt cx="0" cy="0"/>
+        </a:xfrm>
+      </p:grpSpPr>
+      <p:sp>
+        <p:nvSpPr>
+          <p:cNvPr id="2" name="TextBox 1">
+            <a:extLst>
+              <a:ext uri="{FF2B5EF4-FFF2-40B4-BE49-F238E27FC236}">
+                <a16:creationId xmlns:a16="http://schemas.microsoft.com/office/drawing/2014/main" id="{1FF97A56-4D4A-3F47-9FFF-C6919AE57058}"/>
+              </a:ext>
+            </a:extLst>
+          </p:cNvPr>
+          <p:cNvSpPr txBox="1"/>
+          <p:nvPr/>
+        </p:nvSpPr>
+        <p:spPr>
+          <a:xfrm>
+            <a:off x="142504" y="118753"/>
+            <a:ext cx="3857995" cy="523220"/>
+          </a:xfrm>
+          <a:prstGeom prst="rect">
+            <a:avLst/>
+          </a:prstGeom>
+          <a:noFill/>
+        </p:spPr>
+        <p:txBody>
+          <a:bodyPr wrap="square" rtlCol="0">
+            <a:spAutoFit/>
+          </a:bodyPr>
+          <a:lstStyle/>
+          <a:p>
+            <a:r>
+              <a:rPr lang="en-US" sz="2800" b="1" dirty="0"/>
+              <a:t>Kimball DW Framework</a:t>
+            </a:r>
+          </a:p>
+        </p:txBody>
+      </p:sp>
+      <p:pic>
+        <p:nvPicPr>
+          <p:cNvPr id="1028" name="Picture 4" descr="Kimball Group | Dimensional Data Warehousing Experts">
+            <a:extLst>
+              <a:ext uri="{FF2B5EF4-FFF2-40B4-BE49-F238E27FC236}">
+                <a16:creationId xmlns:a16="http://schemas.microsoft.com/office/drawing/2014/main" id="{54BE1611-AB11-B843-B335-0B1AD870C097}"/>
+              </a:ext>
+            </a:extLst>
+          </p:cNvPr>
+          <p:cNvPicPr>
+            <a:picLocks noChangeAspect="1" noChangeArrowheads="1"/>
+          </p:cNvPicPr>
+          <p:nvPr/>
+        </p:nvPicPr>
+        <p:blipFill>
+          <a:blip r:embed="rId2" cstate="email">
+            <a:extLst>
+              <a:ext uri="{28A0092B-C50C-407E-A947-70E740481C1C}">
+                <a14:useLocalDpi xmlns:a14="http://schemas.microsoft.com/office/drawing/2010/main"/>
+              </a:ext>
+            </a:extLst>
+          </a:blip>
+          <a:srcRect/>
+          <a:stretch>
+            <a:fillRect/>
+          </a:stretch>
+        </p:blipFill>
+        <p:spPr bwMode="auto">
+          <a:xfrm>
+            <a:off x="2591645" y="781336"/>
+            <a:ext cx="1720112" cy="2013789"/>
+          </a:xfrm>
+          <a:prstGeom prst="rect">
+            <a:avLst/>
+          </a:prstGeom>
+          <a:noFill/>
+          <a:extLst>
+            <a:ext uri="{909E8E84-426E-40DD-AFC4-6F175D3DCCD1}">
+              <a14:hiddenFill xmlns:a14="http://schemas.microsoft.com/office/drawing/2010/main">
+                <a:solidFill>
+                  <a:srgbClr val="FFFFFF"/>
+                </a:solidFill>
+              </a14:hiddenFill>
+            </a:ext>
+          </a:extLst>
+        </p:spPr>
+      </p:pic>
+      <p:sp>
+        <p:nvSpPr>
+          <p:cNvPr id="3" name="TextBox 2">
+            <a:extLst>
+              <a:ext uri="{FF2B5EF4-FFF2-40B4-BE49-F238E27FC236}">
+                <a16:creationId xmlns:a16="http://schemas.microsoft.com/office/drawing/2014/main" id="{CB6AC39B-5121-BE4B-B106-D28C9291FF2B}"/>
+              </a:ext>
+            </a:extLst>
+          </p:cNvPr>
+          <p:cNvSpPr txBox="1"/>
+          <p:nvPr/>
+        </p:nvSpPr>
+        <p:spPr>
+          <a:xfrm>
+            <a:off x="1949557" y="2820188"/>
+            <a:ext cx="2901843" cy="584775"/>
+          </a:xfrm>
+          <a:prstGeom prst="rect">
+            <a:avLst/>
+          </a:prstGeom>
+          <a:noFill/>
+        </p:spPr>
+        <p:txBody>
+          <a:bodyPr wrap="square" rtlCol="0">
+            <a:spAutoFit/>
+          </a:bodyPr>
+          <a:lstStyle/>
+          <a:p>
+            <a:r>
+              <a:rPr lang="en-US" sz="1600" dirty="0"/>
+              <a:t>Kimball Group – closed in 2015</a:t>
+            </a:r>
+          </a:p>
+          <a:p>
+            <a:r>
+              <a:rPr lang="en-US" sz="1600" dirty="0">
+                <a:hlinkClick r:id="rId3"/>
+              </a:rPr>
+              <a:t>https://www.kimballgroup.com/</a:t>
+            </a:r>
+            <a:r>
+              <a:rPr lang="en-US" sz="1600" dirty="0"/>
+              <a:t> </a:t>
+            </a:r>
+          </a:p>
+        </p:txBody>
+      </p:sp>
+      <p:pic>
+        <p:nvPicPr>
+          <p:cNvPr id="1032" name="Picture 8">
+            <a:extLst>
+              <a:ext uri="{FF2B5EF4-FFF2-40B4-BE49-F238E27FC236}">
+                <a16:creationId xmlns:a16="http://schemas.microsoft.com/office/drawing/2014/main" id="{25FB8E3B-0DC1-B943-B985-7D05DDC29557}"/>
+              </a:ext>
+            </a:extLst>
+          </p:cNvPr>
+          <p:cNvPicPr>
+            <a:picLocks noChangeAspect="1" noChangeArrowheads="1"/>
+          </p:cNvPicPr>
+          <p:nvPr/>
+        </p:nvPicPr>
+        <p:blipFill>
+          <a:blip r:embed="rId4" cstate="email">
+            <a:extLst>
+              <a:ext uri="{28A0092B-C50C-407E-A947-70E740481C1C}">
+                <a14:useLocalDpi xmlns:a14="http://schemas.microsoft.com/office/drawing/2010/main"/>
+              </a:ext>
+            </a:extLst>
+          </a:blip>
+          <a:srcRect/>
+          <a:stretch>
+            <a:fillRect/>
+          </a:stretch>
+        </p:blipFill>
+        <p:spPr bwMode="auto">
+          <a:xfrm>
+            <a:off x="142504" y="4160462"/>
+            <a:ext cx="1807053" cy="2277069"/>
+          </a:xfrm>
+          <a:prstGeom prst="rect">
+            <a:avLst/>
+          </a:prstGeom>
+          <a:noFill/>
+          <a:extLst>
+            <a:ext uri="{909E8E84-426E-40DD-AFC4-6F175D3DCCD1}">
+              <a14:hiddenFill xmlns:a14="http://schemas.microsoft.com/office/drawing/2010/main">
+                <a:solidFill>
+                  <a:srgbClr val="FFFFFF"/>
+                </a:solidFill>
+              </a14:hiddenFill>
+            </a:ext>
+          </a:extLst>
+        </p:spPr>
+      </p:pic>
+      <p:pic>
+        <p:nvPicPr>
+          <p:cNvPr id="1034" name="Picture 10" descr="Kimball's Data Warehouse Toolkit Classics, 3 Volume Set">
+            <a:extLst>
+              <a:ext uri="{FF2B5EF4-FFF2-40B4-BE49-F238E27FC236}">
+                <a16:creationId xmlns:a16="http://schemas.microsoft.com/office/drawing/2014/main" id="{E667604D-59E9-1345-9E47-35276E3959DF}"/>
+              </a:ext>
+            </a:extLst>
+          </p:cNvPr>
+          <p:cNvPicPr>
+            <a:picLocks noChangeAspect="1" noChangeArrowheads="1"/>
+          </p:cNvPicPr>
+          <p:nvPr/>
+        </p:nvPicPr>
+        <p:blipFill rotWithShape="1">
+          <a:blip r:embed="rId5" cstate="email">
+            <a:extLst>
+              <a:ext uri="{28A0092B-C50C-407E-A947-70E740481C1C}">
+                <a14:useLocalDpi xmlns:a14="http://schemas.microsoft.com/office/drawing/2010/main"/>
+              </a:ext>
+            </a:extLst>
+          </a:blip>
+          <a:srcRect/>
+          <a:stretch/>
+        </p:blipFill>
+        <p:spPr bwMode="auto">
+          <a:xfrm>
+            <a:off x="2793999" y="4160461"/>
+            <a:ext cx="1842059" cy="2277069"/>
+          </a:xfrm>
+          <a:prstGeom prst="rect">
+            <a:avLst/>
+          </a:prstGeom>
+          <a:noFill/>
+          <a:extLst>
+            <a:ext uri="{909E8E84-426E-40DD-AFC4-6F175D3DCCD1}">
+              <a14:hiddenFill xmlns:a14="http://schemas.microsoft.com/office/drawing/2010/main">
+                <a:solidFill>
+                  <a:srgbClr val="FFFFFF"/>
+                </a:solidFill>
+              </a14:hiddenFill>
+            </a:ext>
+          </a:extLst>
+        </p:spPr>
+      </p:pic>
+      <p:sp>
+        <p:nvSpPr>
+          <p:cNvPr id="9" name="TextBox 8">
+            <a:extLst>
+              <a:ext uri="{FF2B5EF4-FFF2-40B4-BE49-F238E27FC236}">
+                <a16:creationId xmlns:a16="http://schemas.microsoft.com/office/drawing/2014/main" id="{5FE68235-DA87-9642-AF27-C4835BC23BB7}"/>
+              </a:ext>
+            </a:extLst>
+          </p:cNvPr>
+          <p:cNvSpPr txBox="1"/>
+          <p:nvPr/>
+        </p:nvSpPr>
+        <p:spPr>
+          <a:xfrm>
+            <a:off x="8191503" y="118753"/>
+            <a:ext cx="3857995" cy="523220"/>
+          </a:xfrm>
+          <a:prstGeom prst="rect">
+            <a:avLst/>
+          </a:prstGeom>
+          <a:noFill/>
+        </p:spPr>
+        <p:txBody>
+          <a:bodyPr wrap="square" rtlCol="0">
+            <a:spAutoFit/>
+          </a:bodyPr>
+          <a:lstStyle/>
+          <a:p>
+            <a:r>
+              <a:rPr lang="en-US" sz="2800" b="1" dirty="0" err="1"/>
+              <a:t>Inmon</a:t>
+            </a:r>
+            <a:r>
+              <a:rPr lang="en-US" sz="2800" b="1" dirty="0"/>
+              <a:t> DW Framework</a:t>
+            </a:r>
+          </a:p>
+        </p:txBody>
+      </p:sp>
+      <p:pic>
+        <p:nvPicPr>
+          <p:cNvPr id="10" name="Picture 6">
+            <a:extLst>
+              <a:ext uri="{FF2B5EF4-FFF2-40B4-BE49-F238E27FC236}">
+                <a16:creationId xmlns:a16="http://schemas.microsoft.com/office/drawing/2014/main" id="{12840A34-CCB8-574E-9DBC-EFB4880CEADB}"/>
+              </a:ext>
+            </a:extLst>
+          </p:cNvPr>
+          <p:cNvPicPr>
+            <a:picLocks noChangeAspect="1" noChangeArrowheads="1"/>
+          </p:cNvPicPr>
+          <p:nvPr/>
+        </p:nvPicPr>
+        <p:blipFill>
+          <a:blip r:embed="rId6" cstate="email">
+            <a:extLst>
+              <a:ext uri="{28A0092B-C50C-407E-A947-70E740481C1C}">
+                <a14:useLocalDpi xmlns:a14="http://schemas.microsoft.com/office/drawing/2010/main"/>
+              </a:ext>
+            </a:extLst>
+          </a:blip>
+          <a:srcRect/>
+          <a:stretch>
+            <a:fillRect/>
+          </a:stretch>
+        </p:blipFill>
+        <p:spPr bwMode="auto">
+          <a:xfrm>
+            <a:off x="9207500" y="852270"/>
+            <a:ext cx="1249610" cy="1816100"/>
+          </a:xfrm>
+          <a:prstGeom prst="rect">
+            <a:avLst/>
+          </a:prstGeom>
+          <a:noFill/>
+          <a:extLst>
+            <a:ext uri="{909E8E84-426E-40DD-AFC4-6F175D3DCCD1}">
+              <a14:hiddenFill xmlns:a14="http://schemas.microsoft.com/office/drawing/2010/main">
+                <a:solidFill>
+                  <a:srgbClr val="FFFFFF"/>
+                </a:solidFill>
+              </a14:hiddenFill>
+            </a:ext>
+          </a:extLst>
+        </p:spPr>
+      </p:pic>
+      <p:sp>
+        <p:nvSpPr>
+          <p:cNvPr id="11" name="TextBox 10">
+            <a:extLst>
+              <a:ext uri="{FF2B5EF4-FFF2-40B4-BE49-F238E27FC236}">
+                <a16:creationId xmlns:a16="http://schemas.microsoft.com/office/drawing/2014/main" id="{EE04A850-E9C3-DB4B-8CFD-9FC3A00FB0FB}"/>
+              </a:ext>
+            </a:extLst>
+          </p:cNvPr>
+          <p:cNvSpPr txBox="1"/>
+          <p:nvPr/>
+        </p:nvSpPr>
+        <p:spPr>
+          <a:xfrm>
+            <a:off x="8890000" y="2687467"/>
+            <a:ext cx="1905000" cy="584775"/>
+          </a:xfrm>
+          <a:prstGeom prst="rect">
+            <a:avLst/>
+          </a:prstGeom>
+          <a:noFill/>
+        </p:spPr>
+        <p:txBody>
+          <a:bodyPr wrap="square" rtlCol="0">
+            <a:spAutoFit/>
+          </a:bodyPr>
+          <a:lstStyle/>
+          <a:p>
+            <a:pPr algn="ctr"/>
+            <a:r>
+              <a:rPr lang="en-US" sz="1600" dirty="0"/>
+              <a:t>William H. </a:t>
+            </a:r>
+            <a:r>
+              <a:rPr lang="en-US" sz="1600" dirty="0" err="1"/>
+              <a:t>Inmon</a:t>
+            </a:r>
+            <a:endParaRPr lang="en-US" sz="1600" dirty="0"/>
+          </a:p>
+          <a:p>
+            <a:pPr algn="ctr"/>
+            <a:r>
+              <a:rPr lang="en-US" sz="1600" dirty="0"/>
+              <a:t>(1945 – present)</a:t>
+            </a:r>
+          </a:p>
+        </p:txBody>
+      </p:sp>
+      <p:pic>
+        <p:nvPicPr>
+          <p:cNvPr id="12" name="Picture 2">
+            <a:extLst>
+              <a:ext uri="{FF2B5EF4-FFF2-40B4-BE49-F238E27FC236}">
+                <a16:creationId xmlns:a16="http://schemas.microsoft.com/office/drawing/2014/main" id="{415DA38A-988E-0D40-BBF8-D685231221F0}"/>
+              </a:ext>
+            </a:extLst>
+          </p:cNvPr>
+          <p:cNvPicPr>
+            <a:picLocks noChangeAspect="1" noChangeArrowheads="1"/>
+          </p:cNvPicPr>
+          <p:nvPr/>
+        </p:nvPicPr>
+        <p:blipFill>
+          <a:blip r:embed="rId7" cstate="email">
+            <a:extLst>
+              <a:ext uri="{28A0092B-C50C-407E-A947-70E740481C1C}">
+                <a14:useLocalDpi xmlns:a14="http://schemas.microsoft.com/office/drawing/2010/main"/>
+              </a:ext>
+            </a:extLst>
+          </a:blip>
+          <a:srcRect/>
+          <a:stretch>
+            <a:fillRect/>
+          </a:stretch>
+        </p:blipFill>
+        <p:spPr bwMode="auto">
+          <a:xfrm>
+            <a:off x="7964060" y="4160461"/>
+            <a:ext cx="1848980" cy="2277069"/>
+          </a:xfrm>
+          <a:prstGeom prst="rect">
+            <a:avLst/>
+          </a:prstGeom>
+          <a:noFill/>
+          <a:extLst>
+            <a:ext uri="{909E8E84-426E-40DD-AFC4-6F175D3DCCD1}">
+              <a14:hiddenFill xmlns:a14="http://schemas.microsoft.com/office/drawing/2010/main">
+                <a:solidFill>
+                  <a:srgbClr val="FFFFFF"/>
+                </a:solidFill>
+              </a14:hiddenFill>
+            </a:ext>
+          </a:extLst>
+        </p:spPr>
+      </p:pic>
+      <p:pic>
+        <p:nvPicPr>
+          <p:cNvPr id="13" name="Picture 4">
+            <a:extLst>
+              <a:ext uri="{FF2B5EF4-FFF2-40B4-BE49-F238E27FC236}">
+                <a16:creationId xmlns:a16="http://schemas.microsoft.com/office/drawing/2014/main" id="{DA81332F-2F81-5B45-954D-22A2A17F45E3}"/>
+              </a:ext>
+            </a:extLst>
+          </p:cNvPr>
+          <p:cNvPicPr>
+            <a:picLocks noChangeAspect="1" noChangeArrowheads="1"/>
+          </p:cNvPicPr>
+          <p:nvPr/>
+        </p:nvPicPr>
+        <p:blipFill>
+          <a:blip r:embed="rId8" cstate="email">
+            <a:extLst>
+              <a:ext uri="{28A0092B-C50C-407E-A947-70E740481C1C}">
+                <a14:useLocalDpi xmlns:a14="http://schemas.microsoft.com/office/drawing/2010/main"/>
+              </a:ext>
+            </a:extLst>
+          </a:blip>
+          <a:srcRect/>
+          <a:stretch>
+            <a:fillRect/>
+          </a:stretch>
+        </p:blipFill>
+        <p:spPr bwMode="auto">
+          <a:xfrm>
+            <a:off x="10169432" y="4160461"/>
+            <a:ext cx="1743167" cy="2277069"/>
+          </a:xfrm>
+          <a:prstGeom prst="rect">
+            <a:avLst/>
+          </a:prstGeom>
+          <a:noFill/>
+          <a:extLst>
+            <a:ext uri="{909E8E84-426E-40DD-AFC4-6F175D3DCCD1}">
+              <a14:hiddenFill xmlns:a14="http://schemas.microsoft.com/office/drawing/2010/main">
+                <a:solidFill>
+                  <a:srgbClr val="FFFFFF"/>
+                </a:solidFill>
+              </a14:hiddenFill>
+            </a:ext>
+          </a:extLst>
+        </p:spPr>
+      </p:pic>
+      <p:pic>
+        <p:nvPicPr>
+          <p:cNvPr id="1036" name="Picture 12" descr="Ralph Kimball data warehouse architecture">
+            <a:extLst>
+              <a:ext uri="{FF2B5EF4-FFF2-40B4-BE49-F238E27FC236}">
+                <a16:creationId xmlns:a16="http://schemas.microsoft.com/office/drawing/2014/main" id="{4B49ABE2-7BEF-644F-91D4-C8C012C6F9F9}"/>
+              </a:ext>
+            </a:extLst>
+          </p:cNvPr>
+          <p:cNvPicPr>
+            <a:picLocks noChangeAspect="1" noChangeArrowheads="1"/>
+          </p:cNvPicPr>
+          <p:nvPr/>
+        </p:nvPicPr>
+        <p:blipFill>
+          <a:blip r:embed="rId9">
+            <a:extLst>
+              <a:ext uri="{28A0092B-C50C-407E-A947-70E740481C1C}">
+                <a14:useLocalDpi xmlns:a14="http://schemas.microsoft.com/office/drawing/2010/main"/>
+              </a:ext>
+            </a:extLst>
+          </a:blip>
+          <a:srcRect/>
+          <a:stretch>
+            <a:fillRect/>
+          </a:stretch>
+        </p:blipFill>
+        <p:spPr bwMode="auto">
+          <a:xfrm>
+            <a:off x="142504" y="781336"/>
+            <a:ext cx="1592386" cy="2070102"/>
+          </a:xfrm>
+          <a:prstGeom prst="rect">
+            <a:avLst/>
+          </a:prstGeom>
+          <a:noFill/>
+          <a:extLst>
+            <a:ext uri="{909E8E84-426E-40DD-AFC4-6F175D3DCCD1}">
+              <a14:hiddenFill xmlns:a14="http://schemas.microsoft.com/office/drawing/2010/main">
+                <a:solidFill>
+                  <a:srgbClr val="FFFFFF"/>
+                </a:solidFill>
+              </a14:hiddenFill>
+            </a:ext>
+          </a:extLst>
+        </p:spPr>
+      </p:pic>
+      <p:sp>
+        <p:nvSpPr>
+          <p:cNvPr id="15" name="TextBox 14">
+            <a:extLst>
+              <a:ext uri="{FF2B5EF4-FFF2-40B4-BE49-F238E27FC236}">
+                <a16:creationId xmlns:a16="http://schemas.microsoft.com/office/drawing/2014/main" id="{EC47885C-34DB-5E4D-BE91-505AFE558C65}"/>
+              </a:ext>
+            </a:extLst>
+          </p:cNvPr>
+          <p:cNvSpPr txBox="1"/>
+          <p:nvPr/>
+        </p:nvSpPr>
+        <p:spPr>
+          <a:xfrm>
+            <a:off x="34040" y="2851438"/>
+            <a:ext cx="1807053" cy="584775"/>
+          </a:xfrm>
+          <a:prstGeom prst="rect">
+            <a:avLst/>
+          </a:prstGeom>
+          <a:noFill/>
+        </p:spPr>
+        <p:txBody>
+          <a:bodyPr wrap="square" rtlCol="0">
+            <a:spAutoFit/>
+          </a:bodyPr>
+          <a:lstStyle/>
+          <a:p>
+            <a:pPr algn="ctr"/>
+            <a:r>
+              <a:rPr lang="en-US" sz="1600" dirty="0"/>
+              <a:t>Ralph Kimball</a:t>
+            </a:r>
+          </a:p>
+          <a:p>
+            <a:pPr algn="ctr"/>
+            <a:r>
+              <a:rPr lang="en-US" sz="1600" dirty="0"/>
+              <a:t>(1944 – present)</a:t>
+            </a:r>
+          </a:p>
+        </p:txBody>
+      </p:sp>
+    </p:spTree>
+    <p:extLst>
+      <p:ext uri="{BB962C8B-B14F-4D97-AF65-F5344CB8AC3E}">
+        <p14:creationId xmlns:p14="http://schemas.microsoft.com/office/powerpoint/2010/main" val="4190198152"/>
+      </p:ext>
+    </p:extLst>
+  </p:cSld>
+  <p:clrMapOvr>
+    <a:masterClrMapping/>
+  </p:clrMapOvr>
+</p:sld>
+</file>
+
+<file path=ppt/slides/slide4.xml><?xml version="1.0" encoding="utf-8"?>
+<p:sld xmlns:a="http://schemas.openxmlformats.org/drawingml/2006/main" xmlns:r="http://schemas.openxmlformats.org/officeDocument/2006/relationships" xmlns:p="http://schemas.openxmlformats.org/presentationml/2006/main">
+  <p:cSld>
+    <p:spTree>
+      <p:nvGrpSpPr>
+        <p:cNvPr id="1" name=""/>
+        <p:cNvGrpSpPr/>
+        <p:nvPr/>
+      </p:nvGrpSpPr>
+      <p:grpSpPr>
+        <a:xfrm>
+          <a:off x="0" y="0"/>
+          <a:ext cx="0" cy="0"/>
+          <a:chOff x="0" y="0"/>
+          <a:chExt cx="0" cy="0"/>
+        </a:xfrm>
+      </p:grpSpPr>
+      <p:pic>
+        <p:nvPicPr>
+          <p:cNvPr id="2" name="Picture 1">
+            <a:extLst>
+              <a:ext uri="{FF2B5EF4-FFF2-40B4-BE49-F238E27FC236}">
+                <a16:creationId xmlns:a16="http://schemas.microsoft.com/office/drawing/2014/main" id="{F4626B5A-FFA5-2E46-962E-FE8D97840C15}"/>
+              </a:ext>
+            </a:extLst>
+          </p:cNvPr>
+          <p:cNvPicPr>
+            <a:picLocks noChangeAspect="1"/>
+          </p:cNvPicPr>
+          <p:nvPr/>
+        </p:nvPicPr>
+        <p:blipFill>
+          <a:blip r:embed="rId2" cstate="email">
+            <a:extLst>
+              <a:ext uri="{28A0092B-C50C-407E-A947-70E740481C1C}">
+                <a14:useLocalDpi xmlns:a14="http://schemas.microsoft.com/office/drawing/2010/main"/>
+              </a:ext>
+            </a:extLst>
+          </a:blip>
+          <a:stretch>
+            <a:fillRect/>
+          </a:stretch>
+        </p:blipFill>
+        <p:spPr>
+          <a:xfrm>
+            <a:off x="6096000" y="469900"/>
+            <a:ext cx="5005169" cy="5918200"/>
+          </a:xfrm>
+          <a:prstGeom prst="rect">
+            <a:avLst/>
+          </a:prstGeom>
+        </p:spPr>
+      </p:pic>
+      <p:sp>
+        <p:nvSpPr>
+          <p:cNvPr id="3" name="TextBox 2">
+            <a:extLst>
+              <a:ext uri="{FF2B5EF4-FFF2-40B4-BE49-F238E27FC236}">
+                <a16:creationId xmlns:a16="http://schemas.microsoft.com/office/drawing/2014/main" id="{5A9966EE-FAC1-274E-90CA-F50154FF7E2C}"/>
+              </a:ext>
+            </a:extLst>
+          </p:cNvPr>
+          <p:cNvSpPr txBox="1"/>
+          <p:nvPr/>
+        </p:nvSpPr>
+        <p:spPr>
+          <a:xfrm>
+            <a:off x="268068" y="755789"/>
+            <a:ext cx="5256431" cy="5632311"/>
+          </a:xfrm>
+          <a:prstGeom prst="rect">
+            <a:avLst/>
+          </a:prstGeom>
+          <a:noFill/>
+        </p:spPr>
+        <p:txBody>
+          <a:bodyPr wrap="square" rtlCol="0">
+            <a:spAutoFit/>
+          </a:bodyPr>
+          <a:lstStyle/>
+          <a:p>
+            <a:r>
+              <a:rPr lang="en-US" dirty="0"/>
+              <a:t>Ralph Kimball’s paradigm: </a:t>
+            </a:r>
+          </a:p>
+          <a:p>
+            <a:endParaRPr lang="en-US" dirty="0"/>
+          </a:p>
+          <a:p>
+            <a:pPr marL="285750" indent="-285750">
+              <a:buFont typeface="Arial" panose="020B0604020202020204" pitchFamily="34" charset="0"/>
+              <a:buChar char="•"/>
+            </a:pPr>
+            <a:r>
+              <a:rPr lang="en-US" dirty="0"/>
+              <a:t>Data warehouse is the conglomerate of all data marts within the enterprise. </a:t>
+            </a:r>
+          </a:p>
+          <a:p>
+            <a:pPr marL="285750" indent="-285750">
+              <a:buFont typeface="Arial" panose="020B0604020202020204" pitchFamily="34" charset="0"/>
+              <a:buChar char="•"/>
+            </a:pPr>
+            <a:r>
+              <a:rPr lang="en-US" dirty="0"/>
+              <a:t>Information is always stored in the dimensional model.</a:t>
+            </a:r>
+          </a:p>
+          <a:p>
+            <a:endParaRPr lang="en-US" dirty="0"/>
+          </a:p>
+          <a:p>
+            <a:endParaRPr lang="en-US" dirty="0"/>
+          </a:p>
+          <a:p>
+            <a:endParaRPr lang="en-US" dirty="0"/>
+          </a:p>
+          <a:p>
+            <a:endParaRPr lang="en-US" dirty="0"/>
+          </a:p>
+          <a:p>
+            <a:endParaRPr lang="en-US" dirty="0"/>
+          </a:p>
+          <a:p>
+            <a:r>
+              <a:rPr lang="en-US" dirty="0"/>
+              <a:t>Bill </a:t>
+            </a:r>
+            <a:r>
+              <a:rPr lang="en-US" dirty="0" err="1"/>
+              <a:t>Inmon’s</a:t>
+            </a:r>
+            <a:r>
+              <a:rPr lang="en-US" dirty="0"/>
+              <a:t> paradigm: </a:t>
+            </a:r>
+          </a:p>
+          <a:p>
+            <a:endParaRPr lang="en-US" dirty="0"/>
+          </a:p>
+          <a:p>
+            <a:pPr marL="285750" indent="-285750">
+              <a:buFont typeface="Arial" panose="020B0604020202020204" pitchFamily="34" charset="0"/>
+              <a:buChar char="•"/>
+            </a:pPr>
+            <a:r>
+              <a:rPr lang="en-US" dirty="0"/>
+              <a:t>Data warehouse is one part of the overall business intelligence system. </a:t>
+            </a:r>
+          </a:p>
+          <a:p>
+            <a:pPr marL="285750" indent="-285750">
+              <a:buFont typeface="Arial" panose="020B0604020202020204" pitchFamily="34" charset="0"/>
+              <a:buChar char="•"/>
+            </a:pPr>
+            <a:r>
+              <a:rPr lang="en-US" dirty="0"/>
+              <a:t>An enterprise has one data warehouse, and data marts source their information from the data warehouse. </a:t>
+            </a:r>
+          </a:p>
+          <a:p>
+            <a:pPr marL="285750" indent="-285750">
+              <a:buFont typeface="Arial" panose="020B0604020202020204" pitchFamily="34" charset="0"/>
+              <a:buChar char="•"/>
+            </a:pPr>
+            <a:r>
+              <a:rPr lang="en-US" dirty="0"/>
+              <a:t>In the data warehouse, information is stored in 3rd normal form.</a:t>
+            </a:r>
+          </a:p>
+        </p:txBody>
+      </p:sp>
+    </p:spTree>
+    <p:extLst>
+      <p:ext uri="{BB962C8B-B14F-4D97-AF65-F5344CB8AC3E}">
+        <p14:creationId xmlns:p14="http://schemas.microsoft.com/office/powerpoint/2010/main" val="3750064097"/>
+      </p:ext>
+    </p:extLst>
+  </p:cSld>
+  <p:clrMapOvr>
+    <a:masterClrMapping/>
+  </p:clrMapOvr>
+</p:sld>
+</file>
+
 <file path=ppt/theme/theme1.xml><?xml version="1.0" encoding="utf-8"?>
 <a:theme xmlns:a="http://schemas.openxmlformats.org/drawingml/2006/main" name="Office Theme">
   <a:themeElements>
